--- a/ゲーム科1年/01_後期/ゲーム制作実習Ⅰ/バージョン管理/00_バージョン管理とは.pptx
+++ b/ゲーム科1年/01_後期/ゲーム制作実習Ⅰ/バージョン管理/00_バージョン管理とは.pptx
@@ -260,7 +260,7 @@
           <a:p>
             <a:fld id="{E9CC885B-4903-4D54-9A93-00025F12DED9}" type="datetimeFigureOut">
               <a:rPr kumimoji="1" lang="ja-JP" altLang="en-US" smtClean="0"/>
-              <a:t>2025/1/17</a:t>
+              <a:t>2026/1/15</a:t>
             </a:fld>
             <a:endParaRPr kumimoji="1" lang="ja-JP" altLang="en-US"/>
           </a:p>
@@ -490,7 +490,7 @@
           <a:p>
             <a:fld id="{E9CC885B-4903-4D54-9A93-00025F12DED9}" type="datetimeFigureOut">
               <a:rPr kumimoji="1" lang="ja-JP" altLang="en-US" smtClean="0"/>
-              <a:t>2025/1/17</a:t>
+              <a:t>2026/1/15</a:t>
             </a:fld>
             <a:endParaRPr kumimoji="1" lang="ja-JP" altLang="en-US"/>
           </a:p>
@@ -730,7 +730,7 @@
           <a:p>
             <a:fld id="{E9CC885B-4903-4D54-9A93-00025F12DED9}" type="datetimeFigureOut">
               <a:rPr kumimoji="1" lang="ja-JP" altLang="en-US" smtClean="0"/>
-              <a:t>2025/1/17</a:t>
+              <a:t>2026/1/15</a:t>
             </a:fld>
             <a:endParaRPr kumimoji="1" lang="ja-JP" altLang="en-US"/>
           </a:p>
@@ -960,7 +960,7 @@
           <a:p>
             <a:fld id="{E9CC885B-4903-4D54-9A93-00025F12DED9}" type="datetimeFigureOut">
               <a:rPr kumimoji="1" lang="ja-JP" altLang="en-US" smtClean="0"/>
-              <a:t>2025/1/17</a:t>
+              <a:t>2026/1/15</a:t>
             </a:fld>
             <a:endParaRPr kumimoji="1" lang="ja-JP" altLang="en-US"/>
           </a:p>
@@ -1235,7 +1235,7 @@
           <a:p>
             <a:fld id="{E9CC885B-4903-4D54-9A93-00025F12DED9}" type="datetimeFigureOut">
               <a:rPr kumimoji="1" lang="ja-JP" altLang="en-US" smtClean="0"/>
-              <a:t>2025/1/17</a:t>
+              <a:t>2026/1/15</a:t>
             </a:fld>
             <a:endParaRPr kumimoji="1" lang="ja-JP" altLang="en-US"/>
           </a:p>
@@ -1564,7 +1564,7 @@
           <a:p>
             <a:fld id="{E9CC885B-4903-4D54-9A93-00025F12DED9}" type="datetimeFigureOut">
               <a:rPr kumimoji="1" lang="ja-JP" altLang="en-US" smtClean="0"/>
-              <a:t>2025/1/17</a:t>
+              <a:t>2026/1/15</a:t>
             </a:fld>
             <a:endParaRPr kumimoji="1" lang="ja-JP" altLang="en-US"/>
           </a:p>
@@ -2040,7 +2040,7 @@
           <a:p>
             <a:fld id="{E9CC885B-4903-4D54-9A93-00025F12DED9}" type="datetimeFigureOut">
               <a:rPr kumimoji="1" lang="ja-JP" altLang="en-US" smtClean="0"/>
-              <a:t>2025/1/17</a:t>
+              <a:t>2026/1/15</a:t>
             </a:fld>
             <a:endParaRPr kumimoji="1" lang="ja-JP" altLang="en-US"/>
           </a:p>
@@ -2181,7 +2181,7 @@
           <a:p>
             <a:fld id="{E9CC885B-4903-4D54-9A93-00025F12DED9}" type="datetimeFigureOut">
               <a:rPr kumimoji="1" lang="ja-JP" altLang="en-US" smtClean="0"/>
-              <a:t>2025/1/17</a:t>
+              <a:t>2026/1/15</a:t>
             </a:fld>
             <a:endParaRPr kumimoji="1" lang="ja-JP" altLang="en-US"/>
           </a:p>
@@ -2294,7 +2294,7 @@
           <a:p>
             <a:fld id="{E9CC885B-4903-4D54-9A93-00025F12DED9}" type="datetimeFigureOut">
               <a:rPr kumimoji="1" lang="ja-JP" altLang="en-US" smtClean="0"/>
-              <a:t>2025/1/17</a:t>
+              <a:t>2026/1/15</a:t>
             </a:fld>
             <a:endParaRPr kumimoji="1" lang="ja-JP" altLang="en-US"/>
           </a:p>
@@ -2637,7 +2637,7 @@
           <a:p>
             <a:fld id="{E9CC885B-4903-4D54-9A93-00025F12DED9}" type="datetimeFigureOut">
               <a:rPr kumimoji="1" lang="ja-JP" altLang="en-US" smtClean="0"/>
-              <a:t>2025/1/17</a:t>
+              <a:t>2026/1/15</a:t>
             </a:fld>
             <a:endParaRPr kumimoji="1" lang="ja-JP" altLang="en-US"/>
           </a:p>
@@ -2925,7 +2925,7 @@
           <a:p>
             <a:fld id="{E9CC885B-4903-4D54-9A93-00025F12DED9}" type="datetimeFigureOut">
               <a:rPr kumimoji="1" lang="ja-JP" altLang="en-US" smtClean="0"/>
-              <a:t>2025/1/17</a:t>
+              <a:t>2026/1/15</a:t>
             </a:fld>
             <a:endParaRPr kumimoji="1" lang="ja-JP" altLang="en-US"/>
           </a:p>
@@ -3198,7 +3198,7 @@
           <a:p>
             <a:fld id="{E9CC885B-4903-4D54-9A93-00025F12DED9}" type="datetimeFigureOut">
               <a:rPr kumimoji="1" lang="ja-JP" altLang="en-US" smtClean="0"/>
-              <a:t>2025/1/17</a:t>
+              <a:t>2026/1/15</a:t>
             </a:fld>
             <a:endParaRPr kumimoji="1" lang="ja-JP" altLang="en-US"/>
           </a:p>
@@ -3718,7 +3718,7 @@
           <a:p>
             <a:r>
               <a:rPr kumimoji="1" lang="ja-JP" altLang="en-US" sz="2400" dirty="0"/>
-              <a:t>間違って誤った書き換えをしたり、消してしまったりなど、</a:t>
+              <a:t>誤った書き換えをしたり、間違って消してしまったりなど、</a:t>
             </a:r>
             <a:endParaRPr kumimoji="1" lang="en-US" altLang="ja-JP" sz="2400" dirty="0"/>
           </a:p>
